--- a/docs/instr_tracer_synth_arch.pptx
+++ b/docs/instr_tracer_synth_arch.pptx
@@ -17,6 +17,7 @@
     <p:sldId id="265" r:id="rId16"/>
     <p:sldId id="266" r:id="rId17"/>
     <p:sldId id="267" r:id="rId18"/>
+    <p:sldId id="268" r:id="rId19"/>
   </p:sldIdLst>
   <p:sldSz cx="12191695" cy="6858000" type="screen4x3"/>
   <p:notesSz cx="6858000" cy="9144000"/>
@@ -4460,6 +4461,1688 @@
               </a:defRPr>
             </a:pPr>
             <a:r>
+              <a:t>Where each signal is collected in the CVA6 pipeline</a:t>
+            </a:r>
+          </a:p>
+          <a:p>
+            <a:pPr>
+              <a:defRPr sz="1250">
+                <a:solidFill>
+                  <a:srgbClr val="C4D4E6"/>
+                </a:solidFill>
+              </a:defRPr>
+            </a:pPr>
+            <a:r>
+              <a:t>bind resolves these expressions in the `ariane` scope (instr_tracer_synth_bind.sv); the vector taps reach into Ara at the ara_system level (tb_ara_system_trace.sv).</a:t>
+            </a:r>
+          </a:p>
+        </p:txBody>
+      </p:sp>
+      <p:sp>
+        <p:nvSpPr>
+          <p:cNvPr id="3" name="Rectangle 2"/>
+          <p:cNvSpPr/>
+          <p:nvPr/>
+        </p:nvSpPr>
+        <p:spPr>
+          <a:xfrm>
+            <a:off x="0" y="841248"/>
+            <a:ext cx="12191695" cy="54864"/>
+          </a:xfrm>
+          <a:prstGeom prst="rect">
+            <a:avLst/>
+          </a:prstGeom>
+          <a:solidFill>
+            <a:srgbClr val="2E6DB4"/>
+          </a:solidFill>
+          <a:ln>
+            <a:noFill/>
+          </a:ln>
+          <a:effectLst/>
+        </p:spPr>
+        <p:style>
+          <a:lnRef idx="1">
+            <a:schemeClr val="accent1"/>
+          </a:lnRef>
+          <a:fillRef idx="3">
+            <a:schemeClr val="accent1"/>
+          </a:fillRef>
+          <a:effectRef idx="2">
+            <a:schemeClr val="accent1"/>
+          </a:effectRef>
+          <a:fontRef idx="minor">
+            <a:schemeClr val="lt1"/>
+          </a:fontRef>
+        </p:style>
+        <p:txBody>
+          <a:bodyPr rtlCol="0" anchor="ctr"/>
+          <a:lstStyle/>
+          <a:p>
+            <a:pPr algn="ctr"/>
+          </a:p>
+        </p:txBody>
+      </p:sp>
+      <p:sp>
+        <p:nvSpPr>
+          <p:cNvPr id="4" name="TextBox 3"/>
+          <p:cNvSpPr txBox="1"/>
+          <p:nvPr/>
+        </p:nvSpPr>
+        <p:spPr>
+          <a:xfrm>
+            <a:off x="365760" y="1060704"/>
+            <a:ext cx="8229600" cy="274320"/>
+          </a:xfrm>
+          <a:prstGeom prst="rect">
+            <a:avLst/>
+          </a:prstGeom>
+          <a:noFill/>
+        </p:spPr>
+        <p:txBody>
+          <a:bodyPr wrap="square" tIns="0" bIns="0">
+            <a:spAutoFit/>
+          </a:bodyPr>
+          <a:lstStyle/>
+          <a:p>
+            <a:pPr algn="l"/>
+            <a:r>
+              <a:rPr sz="1200" b="1" i="0">
+                <a:solidFill>
+                  <a:srgbClr val="1F3A5F"/>
+                </a:solidFill>
+              </a:rPr>
+              <a:t>module  ariane   (CVA6 core)  —  bind scope</a:t>
+            </a:r>
+          </a:p>
+        </p:txBody>
+      </p:sp>
+      <p:sp>
+        <p:nvSpPr>
+          <p:cNvPr id="5" name="Rounded Rectangle 4"/>
+          <p:cNvSpPr/>
+          <p:nvPr/>
+        </p:nvSpPr>
+        <p:spPr>
+          <a:xfrm>
+            <a:off x="365760" y="1417320"/>
+            <a:ext cx="1051560" cy="896112"/>
+          </a:xfrm>
+          <a:prstGeom prst="roundRect">
+            <a:avLst/>
+          </a:prstGeom>
+          <a:solidFill>
+            <a:srgbClr val="ECEEF2"/>
+          </a:solidFill>
+          <a:ln w="19050">
+            <a:solidFill>
+              <a:srgbClr val="1F3A5F"/>
+            </a:solidFill>
+          </a:ln>
+          <a:effectLst/>
+        </p:spPr>
+        <p:style>
+          <a:lnRef idx="1">
+            <a:schemeClr val="accent1"/>
+          </a:lnRef>
+          <a:fillRef idx="3">
+            <a:schemeClr val="accent1"/>
+          </a:fillRef>
+          <a:effectRef idx="2">
+            <a:schemeClr val="accent1"/>
+          </a:effectRef>
+          <a:fontRef idx="minor">
+            <a:schemeClr val="lt1"/>
+          </a:fontRef>
+        </p:style>
+        <p:txBody>
+          <a:bodyPr rtlCol="0" anchor="ctr" wrap="square" lIns="64008" rIns="64008" tIns="27432" bIns="27432"/>
+          <a:lstStyle/>
+          <a:p>
+            <a:pPr algn="ctr"/>
+            <a:r>
+              <a:rPr sz="1150" b="1">
+                <a:solidFill>
+                  <a:srgbClr val="1F3A5F"/>
+                </a:solidFill>
+              </a:rPr>
+              <a:t>IF · PC</a:t>
+            </a:r>
+          </a:p>
+        </p:txBody>
+      </p:sp>
+      <p:sp>
+        <p:nvSpPr>
+          <p:cNvPr id="6" name="Rounded Rectangle 5"/>
+          <p:cNvSpPr/>
+          <p:nvPr/>
+        </p:nvSpPr>
+        <p:spPr>
+          <a:xfrm>
+            <a:off x="1554480" y="1417320"/>
+            <a:ext cx="1051560" cy="896112"/>
+          </a:xfrm>
+          <a:prstGeom prst="roundRect">
+            <a:avLst/>
+          </a:prstGeom>
+          <a:solidFill>
+            <a:srgbClr val="ECEEF2"/>
+          </a:solidFill>
+          <a:ln w="19050">
+            <a:solidFill>
+              <a:srgbClr val="1F3A5F"/>
+            </a:solidFill>
+          </a:ln>
+          <a:effectLst/>
+        </p:spPr>
+        <p:style>
+          <a:lnRef idx="1">
+            <a:schemeClr val="accent1"/>
+          </a:lnRef>
+          <a:fillRef idx="3">
+            <a:schemeClr val="accent1"/>
+          </a:fillRef>
+          <a:effectRef idx="2">
+            <a:schemeClr val="accent1"/>
+          </a:effectRef>
+          <a:fontRef idx="minor">
+            <a:schemeClr val="lt1"/>
+          </a:fontRef>
+        </p:style>
+        <p:txBody>
+          <a:bodyPr rtlCol="0" anchor="ctr" wrap="square" lIns="64008" rIns="64008" tIns="27432" bIns="27432"/>
+          <a:lstStyle/>
+          <a:p>
+            <a:pPr algn="ctr"/>
+            <a:r>
+              <a:rPr sz="1150" b="1">
+                <a:solidFill>
+                  <a:srgbClr val="1F3A5F"/>
+                </a:solidFill>
+              </a:rPr>
+              <a:t>ID</a:t>
+            </a:r>
+          </a:p>
+        </p:txBody>
+      </p:sp>
+      <p:sp>
+        <p:nvSpPr>
+          <p:cNvPr id="7" name="Rounded Rectangle 6"/>
+          <p:cNvSpPr/>
+          <p:nvPr/>
+        </p:nvSpPr>
+        <p:spPr>
+          <a:xfrm>
+            <a:off x="2743200" y="1417320"/>
+            <a:ext cx="1371600" cy="896112"/>
+          </a:xfrm>
+          <a:prstGeom prst="roundRect">
+            <a:avLst/>
+          </a:prstGeom>
+          <a:solidFill>
+            <a:srgbClr val="ECEEF2"/>
+          </a:solidFill>
+          <a:ln w="19050">
+            <a:solidFill>
+              <a:srgbClr val="1F3A5F"/>
+            </a:solidFill>
+          </a:ln>
+          <a:effectLst/>
+        </p:spPr>
+        <p:style>
+          <a:lnRef idx="1">
+            <a:schemeClr val="accent1"/>
+          </a:lnRef>
+          <a:fillRef idx="3">
+            <a:schemeClr val="accent1"/>
+          </a:fillRef>
+          <a:effectRef idx="2">
+            <a:schemeClr val="accent1"/>
+          </a:effectRef>
+          <a:fontRef idx="minor">
+            <a:schemeClr val="lt1"/>
+          </a:fontRef>
+        </p:style>
+        <p:txBody>
+          <a:bodyPr rtlCol="0" anchor="ctr" wrap="square" lIns="64008" rIns="64008" tIns="27432" bIns="27432"/>
+          <a:lstStyle/>
+          <a:p>
+            <a:pPr algn="ctr"/>
+            <a:r>
+              <a:rPr sz="1150" b="1">
+                <a:solidFill>
+                  <a:srgbClr val="1F3A5F"/>
+                </a:solidFill>
+              </a:rPr>
+              <a:t>Issue</a:t>
+            </a:r>
+          </a:p>
+        </p:txBody>
+      </p:sp>
+      <p:sp>
+        <p:nvSpPr>
+          <p:cNvPr id="8" name="Rounded Rectangle 7"/>
+          <p:cNvSpPr/>
+          <p:nvPr/>
+        </p:nvSpPr>
+        <p:spPr>
+          <a:xfrm>
+            <a:off x="4251960" y="1417320"/>
+            <a:ext cx="1828800" cy="896112"/>
+          </a:xfrm>
+          <a:prstGeom prst="roundRect">
+            <a:avLst/>
+          </a:prstGeom>
+          <a:solidFill>
+            <a:srgbClr val="DCEAFB"/>
+          </a:solidFill>
+          <a:ln w="19050">
+            <a:solidFill>
+              <a:srgbClr val="2E6DB4"/>
+            </a:solidFill>
+          </a:ln>
+          <a:effectLst/>
+        </p:spPr>
+        <p:style>
+          <a:lnRef idx="1">
+            <a:schemeClr val="accent1"/>
+          </a:lnRef>
+          <a:fillRef idx="3">
+            <a:schemeClr val="accent1"/>
+          </a:fillRef>
+          <a:effectRef idx="2">
+            <a:schemeClr val="accent1"/>
+          </a:effectRef>
+          <a:fontRef idx="minor">
+            <a:schemeClr val="lt1"/>
+          </a:fontRef>
+        </p:style>
+        <p:txBody>
+          <a:bodyPr rtlCol="0" anchor="ctr" wrap="square" lIns="64008" rIns="64008" tIns="27432" bIns="27432"/>
+          <a:lstStyle/>
+          <a:p>
+            <a:pPr algn="ctr"/>
+            <a:r>
+              <a:rPr sz="1250" b="1">
+                <a:solidFill>
+                  <a:srgbClr val="1F3A5F"/>
+                </a:solidFill>
+              </a:rPr>
+              <a:t>EX</a:t>
+            </a:r>
+          </a:p>
+          <a:p>
+            <a:pPr algn="ctr">
+              <a:spcBef>
+                <a:spcPts val="100"/>
+              </a:spcBef>
+            </a:pPr>
+            <a:r>
+              <a:rPr sz="850">
+                <a:solidFill>
+                  <a:srgbClr val="404040"/>
+                </a:solidFill>
+                <a:latin typeface="Consolas"/>
+              </a:rPr>
+              <a:t>ALU · MUL · FPU</a:t>
+            </a:r>
+          </a:p>
+          <a:p>
+            <a:pPr algn="ctr">
+              <a:spcBef>
+                <a:spcPts val="100"/>
+              </a:spcBef>
+            </a:pPr>
+            <a:r>
+              <a:rPr sz="850">
+                <a:solidFill>
+                  <a:srgbClr val="404040"/>
+                </a:solidFill>
+                <a:latin typeface="Consolas"/>
+              </a:rPr>
+              <a:t>lsu_i  ·  csr_regfile</a:t>
+            </a:r>
+          </a:p>
+        </p:txBody>
+      </p:sp>
+      <p:sp>
+        <p:nvSpPr>
+          <p:cNvPr id="9" name="Rounded Rectangle 8"/>
+          <p:cNvSpPr/>
+          <p:nvPr/>
+        </p:nvSpPr>
+        <p:spPr>
+          <a:xfrm>
+            <a:off x="6217920" y="1417320"/>
+            <a:ext cx="2240280" cy="896112"/>
+          </a:xfrm>
+          <a:prstGeom prst="roundRect">
+            <a:avLst/>
+          </a:prstGeom>
+          <a:solidFill>
+            <a:srgbClr val="DCEAFB"/>
+          </a:solidFill>
+          <a:ln w="19050">
+            <a:solidFill>
+              <a:srgbClr val="2E6DB4"/>
+            </a:solidFill>
+          </a:ln>
+          <a:effectLst/>
+        </p:spPr>
+        <p:style>
+          <a:lnRef idx="1">
+            <a:schemeClr val="accent1"/>
+          </a:lnRef>
+          <a:fillRef idx="3">
+            <a:schemeClr val="accent1"/>
+          </a:fillRef>
+          <a:effectRef idx="2">
+            <a:schemeClr val="accent1"/>
+          </a:effectRef>
+          <a:fontRef idx="minor">
+            <a:schemeClr val="lt1"/>
+          </a:fontRef>
+        </p:style>
+        <p:txBody>
+          <a:bodyPr rtlCol="0" anchor="ctr" wrap="square" lIns="64008" rIns="64008" tIns="27432" bIns="27432"/>
+          <a:lstStyle/>
+          <a:p>
+            <a:pPr algn="ctr"/>
+            <a:r>
+              <a:rPr sz="1250" b="1">
+                <a:solidFill>
+                  <a:srgbClr val="1F3A5F"/>
+                </a:solidFill>
+              </a:rPr>
+              <a:t>Commit stage</a:t>
+            </a:r>
+          </a:p>
+          <a:p>
+            <a:pPr algn="ctr">
+              <a:spcBef>
+                <a:spcPts val="100"/>
+              </a:spcBef>
+            </a:pPr>
+            <a:r>
+              <a:rPr sz="850">
+                <a:solidFill>
+                  <a:srgbClr val="404040"/>
+                </a:solidFill>
+                <a:latin typeface="Consolas"/>
+              </a:rPr>
+              <a:t>commit_ack · exception_o</a:t>
+            </a:r>
+          </a:p>
+        </p:txBody>
+      </p:sp>
+      <p:sp>
+        <p:nvSpPr>
+          <p:cNvPr id="10" name="Rounded Rectangle 9"/>
+          <p:cNvSpPr/>
+          <p:nvPr/>
+        </p:nvSpPr>
+        <p:spPr>
+          <a:xfrm>
+            <a:off x="8915400" y="1417320"/>
+            <a:ext cx="2926080" cy="896112"/>
+          </a:xfrm>
+          <a:prstGeom prst="roundRect">
+            <a:avLst/>
+          </a:prstGeom>
+          <a:solidFill>
+            <a:srgbClr val="D9F0D3"/>
+          </a:solidFill>
+          <a:ln w="19050">
+            <a:solidFill>
+              <a:srgbClr val="4C9A3F"/>
+            </a:solidFill>
+          </a:ln>
+          <a:effectLst/>
+        </p:spPr>
+        <p:style>
+          <a:lnRef idx="1">
+            <a:schemeClr val="accent1"/>
+          </a:lnRef>
+          <a:fillRef idx="3">
+            <a:schemeClr val="accent1"/>
+          </a:fillRef>
+          <a:effectRef idx="2">
+            <a:schemeClr val="accent1"/>
+          </a:effectRef>
+          <a:fontRef idx="minor">
+            <a:schemeClr val="lt1"/>
+          </a:fontRef>
+        </p:style>
+        <p:txBody>
+          <a:bodyPr rtlCol="0" anchor="ctr" wrap="square" lIns="64008" rIns="64008" tIns="27432" bIns="27432"/>
+          <a:lstStyle/>
+          <a:p>
+            <a:pPr algn="ctr"/>
+            <a:r>
+              <a:rPr sz="1250" b="1">
+                <a:solidFill>
+                  <a:srgbClr val="1F3A5F"/>
+                </a:solidFill>
+              </a:rPr>
+              <a:t>Ara vector unit  (i_ara)</a:t>
+            </a:r>
+          </a:p>
+          <a:p>
+            <a:pPr algn="ctr">
+              <a:spcBef>
+                <a:spcPts val="100"/>
+              </a:spcBef>
+            </a:pPr>
+            <a:r>
+              <a:rPr sz="850">
+                <a:solidFill>
+                  <a:srgbClr val="404040"/>
+                </a:solidFill>
+                <a:latin typeface="Consolas"/>
+              </a:rPr>
+              <a:t>i_dispatcher · gen_lanes[L].i_lane</a:t>
+            </a:r>
+          </a:p>
+        </p:txBody>
+      </p:sp>
+      <p:cxnSp>
+        <p:nvCxnSpPr>
+          <p:cNvPr id="11" name="Connector 10"/>
+          <p:cNvCxnSpPr/>
+          <p:nvPr/>
+        </p:nvCxnSpPr>
+        <p:spPr>
+          <a:xfrm>
+            <a:off x="1417320" y="1865376"/>
+            <a:ext cx="137160" cy="0"/>
+          </a:xfrm>
+          <a:prstGeom prst="line">
+            <a:avLst/>
+          </a:prstGeom>
+          <a:ln w="22860">
+            <a:solidFill>
+              <a:srgbClr val="404040"/>
+            </a:solidFill>
+            <a:tailEnd type="triangle" w="med" len="med"/>
+          </a:ln>
+          <a:effectLst/>
+        </p:spPr>
+        <p:style>
+          <a:lnRef idx="2">
+            <a:schemeClr val="accent1"/>
+          </a:lnRef>
+          <a:fillRef idx="0">
+            <a:schemeClr val="accent1"/>
+          </a:fillRef>
+          <a:effectRef idx="1">
+            <a:schemeClr val="accent1"/>
+          </a:effectRef>
+          <a:fontRef idx="minor">
+            <a:schemeClr val="tx1"/>
+          </a:fontRef>
+        </p:style>
+      </p:cxnSp>
+      <p:cxnSp>
+        <p:nvCxnSpPr>
+          <p:cNvPr id="12" name="Connector 11"/>
+          <p:cNvCxnSpPr/>
+          <p:nvPr/>
+        </p:nvCxnSpPr>
+        <p:spPr>
+          <a:xfrm>
+            <a:off x="2606040" y="1865376"/>
+            <a:ext cx="137160" cy="0"/>
+          </a:xfrm>
+          <a:prstGeom prst="line">
+            <a:avLst/>
+          </a:prstGeom>
+          <a:ln w="22860">
+            <a:solidFill>
+              <a:srgbClr val="404040"/>
+            </a:solidFill>
+            <a:tailEnd type="triangle" w="med" len="med"/>
+          </a:ln>
+          <a:effectLst/>
+        </p:spPr>
+        <p:style>
+          <a:lnRef idx="2">
+            <a:schemeClr val="accent1"/>
+          </a:lnRef>
+          <a:fillRef idx="0">
+            <a:schemeClr val="accent1"/>
+          </a:fillRef>
+          <a:effectRef idx="1">
+            <a:schemeClr val="accent1"/>
+          </a:effectRef>
+          <a:fontRef idx="minor">
+            <a:schemeClr val="tx1"/>
+          </a:fontRef>
+        </p:style>
+      </p:cxnSp>
+      <p:cxnSp>
+        <p:nvCxnSpPr>
+          <p:cNvPr id="13" name="Connector 12"/>
+          <p:cNvCxnSpPr/>
+          <p:nvPr/>
+        </p:nvCxnSpPr>
+        <p:spPr>
+          <a:xfrm>
+            <a:off x="4114800" y="1865376"/>
+            <a:ext cx="137160" cy="0"/>
+          </a:xfrm>
+          <a:prstGeom prst="line">
+            <a:avLst/>
+          </a:prstGeom>
+          <a:ln w="22860">
+            <a:solidFill>
+              <a:srgbClr val="404040"/>
+            </a:solidFill>
+            <a:tailEnd type="triangle" w="med" len="med"/>
+          </a:ln>
+          <a:effectLst/>
+        </p:spPr>
+        <p:style>
+          <a:lnRef idx="2">
+            <a:schemeClr val="accent1"/>
+          </a:lnRef>
+          <a:fillRef idx="0">
+            <a:schemeClr val="accent1"/>
+          </a:fillRef>
+          <a:effectRef idx="1">
+            <a:schemeClr val="accent1"/>
+          </a:effectRef>
+          <a:fontRef idx="minor">
+            <a:schemeClr val="tx1"/>
+          </a:fontRef>
+        </p:style>
+      </p:cxnSp>
+      <p:cxnSp>
+        <p:nvCxnSpPr>
+          <p:cNvPr id="14" name="Connector 13"/>
+          <p:cNvCxnSpPr/>
+          <p:nvPr/>
+        </p:nvCxnSpPr>
+        <p:spPr>
+          <a:xfrm>
+            <a:off x="6080760" y="1865376"/>
+            <a:ext cx="137160" cy="0"/>
+          </a:xfrm>
+          <a:prstGeom prst="line">
+            <a:avLst/>
+          </a:prstGeom>
+          <a:ln w="22860">
+            <a:solidFill>
+              <a:srgbClr val="404040"/>
+            </a:solidFill>
+            <a:tailEnd type="triangle" w="med" len="med"/>
+          </a:ln>
+          <a:effectLst/>
+        </p:spPr>
+        <p:style>
+          <a:lnRef idx="2">
+            <a:schemeClr val="accent1"/>
+          </a:lnRef>
+          <a:fillRef idx="0">
+            <a:schemeClr val="accent1"/>
+          </a:fillRef>
+          <a:effectRef idx="1">
+            <a:schemeClr val="accent1"/>
+          </a:effectRef>
+          <a:fontRef idx="minor">
+            <a:schemeClr val="tx1"/>
+          </a:fontRef>
+        </p:style>
+      </p:cxnSp>
+      <p:cxnSp>
+        <p:nvCxnSpPr>
+          <p:cNvPr id="15" name="Connector 14"/>
+          <p:cNvCxnSpPr/>
+          <p:nvPr/>
+        </p:nvCxnSpPr>
+        <p:spPr>
+          <a:xfrm>
+            <a:off x="8458200" y="1865376"/>
+            <a:ext cx="457200" cy="0"/>
+          </a:xfrm>
+          <a:prstGeom prst="line">
+            <a:avLst/>
+          </a:prstGeom>
+          <a:ln w="27940">
+            <a:solidFill>
+              <a:srgbClr val="4C9A3F"/>
+            </a:solidFill>
+            <a:tailEnd type="triangle" w="med" len="med"/>
+          </a:ln>
+          <a:effectLst/>
+        </p:spPr>
+        <p:style>
+          <a:lnRef idx="2">
+            <a:schemeClr val="accent1"/>
+          </a:lnRef>
+          <a:fillRef idx="0">
+            <a:schemeClr val="accent1"/>
+          </a:fillRef>
+          <a:effectRef idx="1">
+            <a:schemeClr val="accent1"/>
+          </a:effectRef>
+          <a:fontRef idx="minor">
+            <a:schemeClr val="tx1"/>
+          </a:fontRef>
+        </p:style>
+      </p:cxnSp>
+      <p:sp>
+        <p:nvSpPr>
+          <p:cNvPr id="16" name="TextBox 15"/>
+          <p:cNvSpPr txBox="1"/>
+          <p:nvPr/>
+        </p:nvSpPr>
+        <p:spPr>
+          <a:xfrm>
+            <a:off x="8229600" y="1188720"/>
+            <a:ext cx="914400" cy="274320"/>
+          </a:xfrm>
+          <a:prstGeom prst="rect">
+            <a:avLst/>
+          </a:prstGeom>
+          <a:noFill/>
+        </p:spPr>
+        <p:txBody>
+          <a:bodyPr wrap="square" tIns="0" bIns="0">
+            <a:spAutoFit/>
+          </a:bodyPr>
+          <a:lstStyle/>
+          <a:p>
+            <a:pPr algn="l"/>
+            <a:r>
+              <a:rPr sz="800" b="1" i="0">
+                <a:solidFill>
+                  <a:srgbClr val="4C9A3F"/>
+                </a:solidFill>
+              </a:rPr>
+              <a:t>fu=ACCEL</a:t>
+            </a:r>
+          </a:p>
+        </p:txBody>
+      </p:sp>
+      <p:sp>
+        <p:nvSpPr>
+          <p:cNvPr id="17" name="Oval 16"/>
+          <p:cNvSpPr/>
+          <p:nvPr/>
+        </p:nvSpPr>
+        <p:spPr>
+          <a:xfrm>
+            <a:off x="4297680" y="1481328"/>
+            <a:ext cx="310896" cy="310896"/>
+          </a:xfrm>
+          <a:prstGeom prst="ellipse">
+            <a:avLst/>
+          </a:prstGeom>
+          <a:solidFill>
+            <a:srgbClr val="7846A0"/>
+          </a:solidFill>
+          <a:ln w="12700">
+            <a:solidFill>
+              <a:srgbClr val="FFFFFF"/>
+            </a:solidFill>
+          </a:ln>
+          <a:effectLst/>
+        </p:spPr>
+        <p:style>
+          <a:lnRef idx="1">
+            <a:schemeClr val="accent1"/>
+          </a:lnRef>
+          <a:fillRef idx="3">
+            <a:schemeClr val="accent1"/>
+          </a:fillRef>
+          <a:effectRef idx="2">
+            <a:schemeClr val="accent1"/>
+          </a:effectRef>
+          <a:fontRef idx="minor">
+            <a:schemeClr val="lt1"/>
+          </a:fontRef>
+        </p:style>
+        <p:txBody>
+          <a:bodyPr rtlCol="0" anchor="ctr" lIns="0" rIns="0" tIns="0" bIns="0"/>
+          <a:lstStyle/>
+          <a:p>
+            <a:pPr algn="ctr"/>
+            <a:r>
+              <a:rPr sz="1500" b="1">
+                <a:solidFill>
+                  <a:srgbClr val="FFFFFF"/>
+                </a:solidFill>
+              </a:rPr>
+              <a:t>2</a:t>
+            </a:r>
+          </a:p>
+        </p:txBody>
+      </p:sp>
+      <p:sp>
+        <p:nvSpPr>
+          <p:cNvPr id="18" name="Oval 17"/>
+          <p:cNvSpPr/>
+          <p:nvPr/>
+        </p:nvSpPr>
+        <p:spPr>
+          <a:xfrm>
+            <a:off x="5687568" y="1481328"/>
+            <a:ext cx="310896" cy="310896"/>
+          </a:xfrm>
+          <a:prstGeom prst="ellipse">
+            <a:avLst/>
+          </a:prstGeom>
+          <a:solidFill>
+            <a:srgbClr val="C4761C"/>
+          </a:solidFill>
+          <a:ln w="12700">
+            <a:solidFill>
+              <a:srgbClr val="FFFFFF"/>
+            </a:solidFill>
+          </a:ln>
+          <a:effectLst/>
+        </p:spPr>
+        <p:style>
+          <a:lnRef idx="1">
+            <a:schemeClr val="accent1"/>
+          </a:lnRef>
+          <a:fillRef idx="3">
+            <a:schemeClr val="accent1"/>
+          </a:fillRef>
+          <a:effectRef idx="2">
+            <a:schemeClr val="accent1"/>
+          </a:effectRef>
+          <a:fontRef idx="minor">
+            <a:schemeClr val="lt1"/>
+          </a:fontRef>
+        </p:style>
+        <p:txBody>
+          <a:bodyPr rtlCol="0" anchor="ctr" lIns="0" rIns="0" tIns="0" bIns="0"/>
+          <a:lstStyle/>
+          <a:p>
+            <a:pPr algn="ctr"/>
+            <a:r>
+              <a:rPr sz="1500" b="1">
+                <a:solidFill>
+                  <a:srgbClr val="FFFFFF"/>
+                </a:solidFill>
+              </a:rPr>
+              <a:t>3</a:t>
+            </a:r>
+          </a:p>
+        </p:txBody>
+      </p:sp>
+      <p:sp>
+        <p:nvSpPr>
+          <p:cNvPr id="19" name="Oval 18"/>
+          <p:cNvSpPr/>
+          <p:nvPr/>
+        </p:nvSpPr>
+        <p:spPr>
+          <a:xfrm>
+            <a:off x="6272784" y="1481328"/>
+            <a:ext cx="310896" cy="310896"/>
+          </a:xfrm>
+          <a:prstGeom prst="ellipse">
+            <a:avLst/>
+          </a:prstGeom>
+          <a:solidFill>
+            <a:srgbClr val="2E6DB4"/>
+          </a:solidFill>
+          <a:ln w="12700">
+            <a:solidFill>
+              <a:srgbClr val="FFFFFF"/>
+            </a:solidFill>
+          </a:ln>
+          <a:effectLst/>
+        </p:spPr>
+        <p:style>
+          <a:lnRef idx="1">
+            <a:schemeClr val="accent1"/>
+          </a:lnRef>
+          <a:fillRef idx="3">
+            <a:schemeClr val="accent1"/>
+          </a:fillRef>
+          <a:effectRef idx="2">
+            <a:schemeClr val="accent1"/>
+          </a:effectRef>
+          <a:fontRef idx="minor">
+            <a:schemeClr val="lt1"/>
+          </a:fontRef>
+        </p:style>
+        <p:txBody>
+          <a:bodyPr rtlCol="0" anchor="ctr" lIns="0" rIns="0" tIns="0" bIns="0"/>
+          <a:lstStyle/>
+          <a:p>
+            <a:pPr algn="ctr"/>
+            <a:r>
+              <a:rPr sz="1500" b="1">
+                <a:solidFill>
+                  <a:srgbClr val="FFFFFF"/>
+                </a:solidFill>
+              </a:rPr>
+              <a:t>1</a:t>
+            </a:r>
+          </a:p>
+        </p:txBody>
+      </p:sp>
+      <p:sp>
+        <p:nvSpPr>
+          <p:cNvPr id="20" name="Oval 19"/>
+          <p:cNvSpPr/>
+          <p:nvPr/>
+        </p:nvSpPr>
+        <p:spPr>
+          <a:xfrm>
+            <a:off x="8961120" y="1481328"/>
+            <a:ext cx="310896" cy="310896"/>
+          </a:xfrm>
+          <a:prstGeom prst="ellipse">
+            <a:avLst/>
+          </a:prstGeom>
+          <a:solidFill>
+            <a:srgbClr val="4C9A3F"/>
+          </a:solidFill>
+          <a:ln w="12700">
+            <a:solidFill>
+              <a:srgbClr val="FFFFFF"/>
+            </a:solidFill>
+          </a:ln>
+          <a:effectLst/>
+        </p:spPr>
+        <p:style>
+          <a:lnRef idx="1">
+            <a:schemeClr val="accent1"/>
+          </a:lnRef>
+          <a:fillRef idx="3">
+            <a:schemeClr val="accent1"/>
+          </a:fillRef>
+          <a:effectRef idx="2">
+            <a:schemeClr val="accent1"/>
+          </a:effectRef>
+          <a:fontRef idx="minor">
+            <a:schemeClr val="lt1"/>
+          </a:fontRef>
+        </p:style>
+        <p:txBody>
+          <a:bodyPr rtlCol="0" anchor="ctr" lIns="0" rIns="0" tIns="0" bIns="0"/>
+          <a:lstStyle/>
+          <a:p>
+            <a:pPr algn="ctr"/>
+            <a:r>
+              <a:rPr sz="1500" b="1">
+                <a:solidFill>
+                  <a:srgbClr val="FFFFFF"/>
+                </a:solidFill>
+              </a:rPr>
+              <a:t>4</a:t>
+            </a:r>
+          </a:p>
+        </p:txBody>
+      </p:sp>
+      <p:sp>
+        <p:nvSpPr>
+          <p:cNvPr id="21" name="Rounded Rectangle 20"/>
+          <p:cNvSpPr/>
+          <p:nvPr/>
+        </p:nvSpPr>
+        <p:spPr>
+          <a:xfrm>
+            <a:off x="320040" y="3246120"/>
+            <a:ext cx="2788920" cy="2907792"/>
+          </a:xfrm>
+          <a:prstGeom prst="roundRect">
+            <a:avLst/>
+          </a:prstGeom>
+          <a:solidFill>
+            <a:srgbClr val="DCEAFB"/>
+          </a:solidFill>
+          <a:ln w="19050">
+            <a:solidFill>
+              <a:srgbClr val="2E6DB4"/>
+            </a:solidFill>
+          </a:ln>
+          <a:effectLst/>
+        </p:spPr>
+        <p:style>
+          <a:lnRef idx="1">
+            <a:schemeClr val="accent1"/>
+          </a:lnRef>
+          <a:fillRef idx="3">
+            <a:schemeClr val="accent1"/>
+          </a:fillRef>
+          <a:effectRef idx="2">
+            <a:schemeClr val="accent1"/>
+          </a:effectRef>
+          <a:fontRef idx="minor">
+            <a:schemeClr val="lt1"/>
+          </a:fontRef>
+        </p:style>
+        <p:txBody>
+          <a:bodyPr rtlCol="0" anchor="ctr" wrap="square" lIns="64008" rIns="64008" tIns="27432" bIns="27432"/>
+          <a:lstStyle/>
+          <a:p>
+            <a:pPr algn="l"/>
+            <a:r>
+              <a:rPr sz="1200" b="1">
+                <a:solidFill>
+                  <a:srgbClr val="1F3A5F"/>
+                </a:solidFill>
+              </a:rPr>
+              <a:t>①  COMMIT STAGE</a:t>
+            </a:r>
+          </a:p>
+          <a:p>
+            <a:pPr algn="l">
+              <a:spcBef>
+                <a:spcPts val="100"/>
+              </a:spcBef>
+            </a:pPr>
+            <a:r>
+              <a:rPr sz="850">
+                <a:solidFill>
+                  <a:srgbClr val="404040"/>
+                </a:solidFill>
+                <a:latin typeface="Consolas"/>
+              </a:rPr>
+              <a:t>commit_instr_id_commit → pc·instr</a:t>
+            </a:r>
+          </a:p>
+          <a:p>
+            <a:pPr algn="l">
+              <a:spcBef>
+                <a:spcPts val="100"/>
+              </a:spcBef>
+            </a:pPr>
+            <a:r>
+              <a:rPr sz="850">
+                <a:solidFill>
+                  <a:srgbClr val="404040"/>
+                </a:solidFill>
+                <a:latin typeface="Consolas"/>
+              </a:rPr>
+              <a:t>  [p].ex.tval[31:0] → instr word</a:t>
+            </a:r>
+          </a:p>
+          <a:p>
+            <a:pPr algn="l">
+              <a:spcBef>
+                <a:spcPts val="100"/>
+              </a:spcBef>
+            </a:pPr>
+            <a:r>
+              <a:rPr sz="850">
+                <a:solidFill>
+                  <a:srgbClr val="404040"/>
+                </a:solidFill>
+                <a:latin typeface="Consolas"/>
+              </a:rPr>
+              <a:t>commit_ack → retired</a:t>
+            </a:r>
+          </a:p>
+          <a:p>
+            <a:pPr algn="l">
+              <a:spcBef>
+                <a:spcPts val="100"/>
+              </a:spcBef>
+            </a:pPr>
+            <a:r>
+              <a:rPr sz="850">
+                <a:solidFill>
+                  <a:srgbClr val="404040"/>
+                </a:solidFill>
+                <a:latin typeface="Consolas"/>
+              </a:rPr>
+              <a:t>waddr/wdata_commit_id → rd·wdata</a:t>
+            </a:r>
+          </a:p>
+          <a:p>
+            <a:pPr algn="l">
+              <a:spcBef>
+                <a:spcPts val="100"/>
+              </a:spcBef>
+            </a:pPr>
+            <a:r>
+              <a:rPr sz="850">
+                <a:solidFill>
+                  <a:srgbClr val="404040"/>
+                </a:solidFill>
+                <a:latin typeface="Consolas"/>
+              </a:rPr>
+              <a:t>we_gpr/we_fpr_commit_id → we·rd_fpr</a:t>
+            </a:r>
+          </a:p>
+          <a:p>
+            <a:pPr algn="l">
+              <a:spcBef>
+                <a:spcPts val="100"/>
+              </a:spcBef>
+            </a:pPr>
+            <a:r>
+              <a:rPr sz="850">
+                <a:solidFill>
+                  <a:srgbClr val="404040"/>
+                </a:solidFill>
+                <a:latin typeface="Consolas"/>
+              </a:rPr>
+              <a:t>priv_lvl · debug_mode → priv·debug</a:t>
+            </a:r>
+          </a:p>
+          <a:p>
+            <a:pPr algn="l">
+              <a:spcBef>
+                <a:spcPts val="100"/>
+              </a:spcBef>
+            </a:pPr>
+            <a:r>
+              <a:rPr sz="850">
+                <a:solidFill>
+                  <a:srgbClr val="404040"/>
+                </a:solidFill>
+                <a:latin typeface="Consolas"/>
+              </a:rPr>
+              <a:t>commit_stage_i.exception_o → trap</a:t>
+            </a:r>
+          </a:p>
+        </p:txBody>
+      </p:sp>
+      <p:sp>
+        <p:nvSpPr>
+          <p:cNvPr id="22" name="Rounded Rectangle 21"/>
+          <p:cNvSpPr/>
+          <p:nvPr/>
+        </p:nvSpPr>
+        <p:spPr>
+          <a:xfrm>
+            <a:off x="3200400" y="3246120"/>
+            <a:ext cx="2788920" cy="2907792"/>
+          </a:xfrm>
+          <a:prstGeom prst="roundRect">
+            <a:avLst/>
+          </a:prstGeom>
+          <a:solidFill>
+            <a:srgbClr val="EEE6F7"/>
+          </a:solidFill>
+          <a:ln w="19050">
+            <a:solidFill>
+              <a:srgbClr val="7846A0"/>
+            </a:solidFill>
+          </a:ln>
+          <a:effectLst/>
+        </p:spPr>
+        <p:style>
+          <a:lnRef idx="1">
+            <a:schemeClr val="accent1"/>
+          </a:lnRef>
+          <a:fillRef idx="3">
+            <a:schemeClr val="accent1"/>
+          </a:fillRef>
+          <a:effectRef idx="2">
+            <a:schemeClr val="accent1"/>
+          </a:effectRef>
+          <a:fontRef idx="minor">
+            <a:schemeClr val="lt1"/>
+          </a:fontRef>
+        </p:style>
+        <p:txBody>
+          <a:bodyPr rtlCol="0" anchor="ctr" wrap="square" lIns="64008" rIns="64008" tIns="27432" bIns="27432"/>
+          <a:lstStyle/>
+          <a:p>
+            <a:pPr algn="l"/>
+            <a:r>
+              <a:rPr sz="1100" b="1">
+                <a:solidFill>
+                  <a:srgbClr val="1F3A5F"/>
+                </a:solidFill>
+              </a:rPr>
+              <a:t>②  CSR WRITE   “c&lt;a&gt;_&lt;n&gt; 0x..”</a:t>
+            </a:r>
+          </a:p>
+          <a:p>
+            <a:pPr algn="l">
+              <a:spcBef>
+                <a:spcPts val="100"/>
+              </a:spcBef>
+            </a:pPr>
+            <a:r>
+              <a:rPr sz="850">
+                <a:solidFill>
+                  <a:srgbClr val="404040"/>
+                </a:solidFill>
+                <a:latin typeface="Consolas"/>
+              </a:rPr>
+              <a:t>csr_commit_commit_ex → pulse</a:t>
+            </a:r>
+          </a:p>
+          <a:p>
+            <a:pPr algn="l">
+              <a:spcBef>
+                <a:spcPts val="100"/>
+              </a:spcBef>
+            </a:pPr>
+            <a:r>
+              <a:rPr sz="850">
+                <a:solidFill>
+                  <a:srgbClr val="404040"/>
+                </a:solidFill>
+                <a:latin typeface="Consolas"/>
+              </a:rPr>
+              <a:t>csr_op_commit_csr → W/S/C</a:t>
+            </a:r>
+          </a:p>
+          <a:p>
+            <a:pPr algn="l">
+              <a:spcBef>
+                <a:spcPts val="100"/>
+              </a:spcBef>
+            </a:pPr>
+            <a:r>
+              <a:rPr sz="850">
+                <a:solidFill>
+                  <a:srgbClr val="404040"/>
+                </a:solidFill>
+                <a:latin typeface="Consolas"/>
+              </a:rPr>
+              <a:t>csr_addr_ex_csr → csr_addr</a:t>
+            </a:r>
+          </a:p>
+          <a:p>
+            <a:pPr algn="l">
+              <a:spcBef>
+                <a:spcPts val="100"/>
+              </a:spcBef>
+            </a:pPr>
+            <a:r>
+              <a:rPr sz="850">
+                <a:solidFill>
+                  <a:srgbClr val="404040"/>
+                </a:solidFill>
+                <a:latin typeface="Consolas"/>
+              </a:rPr>
+              <a:t>csr_wdata_commit_csr → operand</a:t>
+            </a:r>
+          </a:p>
+          <a:p>
+            <a:pPr algn="l">
+              <a:spcBef>
+                <a:spcPts val="100"/>
+              </a:spcBef>
+            </a:pPr>
+            <a:r>
+              <a:rPr sz="850">
+                <a:solidFill>
+                  <a:srgbClr val="404040"/>
+                </a:solidFill>
+                <a:latin typeface="Consolas"/>
+              </a:rPr>
+              <a:t>csr_rdata_csr_commit → old val</a:t>
+            </a:r>
+          </a:p>
+          <a:p>
+            <a:pPr algn="l">
+              <a:spcBef>
+                <a:spcPts val="100"/>
+              </a:spcBef>
+            </a:pPr>
+            <a:r>
+              <a:rPr sz="850">
+                <a:solidFill>
+                  <a:srgbClr val="404040"/>
+                </a:solidFill>
+                <a:latin typeface="Consolas"/>
+              </a:rPr>
+              <a:t/>
+            </a:r>
+          </a:p>
+          <a:p>
+            <a:pPr algn="l">
+              <a:spcBef>
+                <a:spcPts val="100"/>
+              </a:spcBef>
+            </a:pPr>
+            <a:r>
+              <a:rPr sz="850">
+                <a:solidFill>
+                  <a:srgbClr val="404040"/>
+                </a:solidFill>
+                <a:latin typeface="Consolas"/>
+              </a:rPr>
+              <a:t>pre-WARL → --ignore-csr-val</a:t>
+            </a:r>
+          </a:p>
+        </p:txBody>
+      </p:sp>
+      <p:sp>
+        <p:nvSpPr>
+          <p:cNvPr id="23" name="Rounded Rectangle 22"/>
+          <p:cNvSpPr/>
+          <p:nvPr/>
+        </p:nvSpPr>
+        <p:spPr>
+          <a:xfrm>
+            <a:off x="6080760" y="3246120"/>
+            <a:ext cx="2788920" cy="2907792"/>
+          </a:xfrm>
+          <a:prstGeom prst="roundRect">
+            <a:avLst/>
+          </a:prstGeom>
+          <a:solidFill>
+            <a:srgbClr val="FCEEDC"/>
+          </a:solidFill>
+          <a:ln w="19050">
+            <a:solidFill>
+              <a:srgbClr val="C4761C"/>
+            </a:solidFill>
+          </a:ln>
+          <a:effectLst/>
+        </p:spPr>
+        <p:style>
+          <a:lnRef idx="1">
+            <a:schemeClr val="accent1"/>
+          </a:lnRef>
+          <a:fillRef idx="3">
+            <a:schemeClr val="accent1"/>
+          </a:fillRef>
+          <a:effectRef idx="2">
+            <a:schemeClr val="accent1"/>
+          </a:effectRef>
+          <a:fontRef idx="minor">
+            <a:schemeClr val="lt1"/>
+          </a:fontRef>
+        </p:style>
+        <p:txBody>
+          <a:bodyPr rtlCol="0" anchor="ctr" wrap="square" lIns="64008" rIns="64008" tIns="27432" bIns="27432"/>
+          <a:lstStyle/>
+          <a:p>
+            <a:pPr algn="l"/>
+            <a:r>
+              <a:rPr sz="1100" b="1">
+                <a:solidFill>
+                  <a:srgbClr val="1F3A5F"/>
+                </a:solidFill>
+              </a:rPr>
+              <a:t>③  LSU MEM   “mem 0x.. 0x..”</a:t>
+            </a:r>
+          </a:p>
+          <a:p>
+            <a:pPr algn="l">
+              <a:spcBef>
+                <a:spcPts val="100"/>
+              </a:spcBef>
+            </a:pPr>
+            <a:r>
+              <a:rPr sz="850">
+                <a:solidFill>
+                  <a:srgbClr val="404040"/>
+                </a:solidFill>
+                <a:latin typeface="Consolas"/>
+              </a:rPr>
+              <a:t>ex_stage_i.lsu_i :</a:t>
+            </a:r>
+          </a:p>
+          <a:p>
+            <a:pPr algn="l">
+              <a:spcBef>
+                <a:spcPts val="100"/>
+              </a:spcBef>
+            </a:pPr>
+            <a:r>
+              <a:rPr sz="850">
+                <a:solidFill>
+                  <a:srgbClr val="404040"/>
+                </a:solidFill>
+                <a:latin typeface="Consolas"/>
+              </a:rPr>
+              <a:t>store_buffer_i.valid/paddr/</a:t>
+            </a:r>
+          </a:p>
+          <a:p>
+            <a:pPr algn="l">
+              <a:spcBef>
+                <a:spcPts val="100"/>
+              </a:spcBef>
+            </a:pPr>
+            <a:r>
+              <a:rPr sz="850">
+                <a:solidFill>
+                  <a:srgbClr val="404040"/>
+                </a:solidFill>
+                <a:latin typeface="Consolas"/>
+              </a:rPr>
+              <a:t>   data/data_size_i</a:t>
+            </a:r>
+          </a:p>
+          <a:p>
+            <a:pPr algn="l">
+              <a:spcBef>
+                <a:spcPts val="100"/>
+              </a:spcBef>
+            </a:pPr>
+            <a:r>
+              <a:rPr sz="850">
+                <a:solidFill>
+                  <a:srgbClr val="404040"/>
+                </a:solidFill>
+                <a:latin typeface="Consolas"/>
+              </a:rPr>
+              <a:t>load_unit.req_port_o.tag_valid/</a:t>
+            </a:r>
+          </a:p>
+          <a:p>
+            <a:pPr algn="l">
+              <a:spcBef>
+                <a:spcPts val="100"/>
+              </a:spcBef>
+            </a:pPr>
+            <a:r>
+              <a:rPr sz="850">
+                <a:solidFill>
+                  <a:srgbClr val="404040"/>
+                </a:solidFill>
+                <a:latin typeface="Consolas"/>
+              </a:rPr>
+              <a:t>   kill_req/data_size</a:t>
+            </a:r>
+          </a:p>
+          <a:p>
+            <a:pPr algn="l">
+              <a:spcBef>
+                <a:spcPts val="100"/>
+              </a:spcBef>
+            </a:pPr>
+            <a:r>
+              <a:rPr sz="850">
+                <a:solidFill>
+                  <a:srgbClr val="404040"/>
+                </a:solidFill>
+                <a:latin typeface="Consolas"/>
+              </a:rPr>
+              <a:t>load_unit.paddr_i</a:t>
+            </a:r>
+          </a:p>
+          <a:p>
+            <a:pPr algn="l">
+              <a:spcBef>
+                <a:spcPts val="100"/>
+              </a:spcBef>
+            </a:pPr>
+            <a:r>
+              <a:rPr sz="850">
+                <a:solidFill>
+                  <a:srgbClr val="404040"/>
+                </a:solidFill>
+                <a:latin typeface="Consolas"/>
+              </a:rPr>
+              <a:t>flush_ctrl_ex → flush_addr_i</a:t>
+            </a:r>
+          </a:p>
+        </p:txBody>
+      </p:sp>
+      <p:sp>
+        <p:nvSpPr>
+          <p:cNvPr id="24" name="Rounded Rectangle 23"/>
+          <p:cNvSpPr/>
+          <p:nvPr/>
+        </p:nvSpPr>
+        <p:spPr>
+          <a:xfrm>
+            <a:off x="8961120" y="3246120"/>
+            <a:ext cx="2907792" cy="2907792"/>
+          </a:xfrm>
+          <a:prstGeom prst="roundRect">
+            <a:avLst/>
+          </a:prstGeom>
+          <a:solidFill>
+            <a:srgbClr val="D9F0D3"/>
+          </a:solidFill>
+          <a:ln w="19050">
+            <a:solidFill>
+              <a:srgbClr val="4C9A3F"/>
+            </a:solidFill>
+          </a:ln>
+          <a:effectLst/>
+        </p:spPr>
+        <p:style>
+          <a:lnRef idx="1">
+            <a:schemeClr val="accent1"/>
+          </a:lnRef>
+          <a:fillRef idx="3">
+            <a:schemeClr val="accent1"/>
+          </a:fillRef>
+          <a:effectRef idx="2">
+            <a:schemeClr val="accent1"/>
+          </a:effectRef>
+          <a:fontRef idx="minor">
+            <a:schemeClr val="lt1"/>
+          </a:fontRef>
+        </p:style>
+        <p:txBody>
+          <a:bodyPr rtlCol="0" anchor="ctr" wrap="square" lIns="64008" rIns="64008" tIns="27432" bIns="27432"/>
+          <a:lstStyle/>
+          <a:p>
+            <a:pPr algn="l"/>
+            <a:r>
+              <a:rPr sz="1100" b="1">
+                <a:solidFill>
+                  <a:srgbClr val="1F3A5F"/>
+                </a:solidFill>
+              </a:rPr>
+              <a:t>④  ARA VECTOR   “v&lt;vd&gt; 0x..”</a:t>
+            </a:r>
+          </a:p>
+          <a:p>
+            <a:pPr algn="l">
+              <a:spcBef>
+                <a:spcPts val="100"/>
+              </a:spcBef>
+            </a:pPr>
+            <a:r>
+              <a:rPr sz="850">
+                <a:solidFill>
+                  <a:srgbClr val="404040"/>
+                </a:solidFill>
+                <a:latin typeface="Consolas"/>
+              </a:rPr>
+              <a:t>i_dispatcher.vtype_q.vsew/</a:t>
+            </a:r>
+          </a:p>
+          <a:p>
+            <a:pPr algn="l">
+              <a:spcBef>
+                <a:spcPts val="100"/>
+              </a:spcBef>
+            </a:pPr>
+            <a:r>
+              <a:rPr sz="850">
+                <a:solidFill>
+                  <a:srgbClr val="404040"/>
+                </a:solidFill>
+                <a:latin typeface="Consolas"/>
+              </a:rPr>
+              <a:t>   vlmul · vl_q → vsew·vl</a:t>
+            </a:r>
+          </a:p>
+          <a:p>
+            <a:pPr algn="l">
+              <a:spcBef>
+                <a:spcPts val="100"/>
+              </a:spcBef>
+            </a:pPr>
+            <a:r>
+              <a:rPr sz="850">
+                <a:solidFill>
+                  <a:srgbClr val="404040"/>
+                </a:solidFill>
+                <a:latin typeface="Consolas"/>
+              </a:rPr>
+              <a:t>gen_lanes[L].i_lane.vrf_wen/</a:t>
+            </a:r>
+          </a:p>
+          <a:p>
+            <a:pPr algn="l">
+              <a:spcBef>
+                <a:spcPts val="100"/>
+              </a:spcBef>
+            </a:pPr>
+            <a:r>
+              <a:rPr sz="850">
+                <a:solidFill>
+                  <a:srgbClr val="404040"/>
+                </a:solidFill>
+                <a:latin typeface="Consolas"/>
+              </a:rPr>
+              <a:t>   addr/wdata/be</a:t>
+            </a:r>
+          </a:p>
+          <a:p>
+            <a:pPr algn="l">
+              <a:spcBef>
+                <a:spcPts val="100"/>
+              </a:spcBef>
+            </a:pPr>
+            <a:r>
+              <a:rPr sz="850">
+                <a:solidFill>
+                  <a:srgbClr val="404040"/>
+                </a:solidFill>
+                <a:latin typeface="Consolas"/>
+              </a:rPr>
+              <a:t>   → shadow VRF → v[vd] data</a:t>
+            </a:r>
+          </a:p>
+          <a:p>
+            <a:pPr algn="l">
+              <a:spcBef>
+                <a:spcPts val="100"/>
+              </a:spcBef>
+            </a:pPr>
+            <a:r>
+              <a:rPr sz="850">
+                <a:solidFill>
+                  <a:srgbClr val="404040"/>
+                </a:solidFill>
+                <a:latin typeface="Consolas"/>
+              </a:rPr>
+              <a:t/>
+            </a:r>
+          </a:p>
+          <a:p>
+            <a:pPr algn="l">
+              <a:spcBef>
+                <a:spcPts val="100"/>
+              </a:spcBef>
+            </a:pPr>
+            <a:r>
+              <a:rPr sz="850">
+                <a:solidFill>
+                  <a:srgbClr val="404040"/>
+                </a:solidFill>
+                <a:latin typeface="Consolas"/>
+              </a:rPr>
+              <a:t>system-level taps (not bind)</a:t>
+            </a:r>
+          </a:p>
+        </p:txBody>
+      </p:sp>
+      <p:sp>
+        <p:nvSpPr>
+          <p:cNvPr id="25" name="TextBox 24"/>
+          <p:cNvSpPr txBox="1"/>
+          <p:nvPr/>
+        </p:nvSpPr>
+        <p:spPr>
+          <a:xfrm>
+            <a:off x="320040" y="6272784"/>
+            <a:ext cx="11521440" cy="274320"/>
+          </a:xfrm>
+          <a:prstGeom prst="rect">
+            <a:avLst/>
+          </a:prstGeom>
+          <a:noFill/>
+        </p:spPr>
+        <p:txBody>
+          <a:bodyPr wrap="square" tIns="0" bIns="0">
+            <a:spAutoFit/>
+          </a:bodyPr>
+          <a:lstStyle/>
+          <a:p>
+            <a:pPr algn="l"/>
+            <a:r>
+              <a:rPr sz="950" b="0" i="1">
+                <a:solidFill>
+                  <a:srgbClr val="404040"/>
+                </a:solidFill>
+              </a:rPr>
+              <a:t>Scalar taps: instr_tracer_synth_bind.sv (bind ariane).   Vector taps reach into i_ara, wired at ara_system level (tb_ara_system_trace.sv / exampleinit.sv).</a:t>
+            </a:r>
+          </a:p>
+        </p:txBody>
+      </p:sp>
+    </p:spTree>
+  </p:cSld>
+  <p:clrMapOvr>
+    <a:masterClrMapping/>
+  </p:clrMapOvr>
+</p:sld>
+</file>
+
+<file path=ppt/slides/slide12.xml><?xml version="1.0" encoding="utf-8"?>
+<p:sld xmlns:a="http://schemas.openxmlformats.org/drawingml/2006/main" xmlns:p="http://schemas.openxmlformats.org/presentationml/2006/main" xmlns:r="http://schemas.openxmlformats.org/officeDocument/2006/relationships">
+  <p:cSld>
+    <p:spTree>
+      <p:nvGrpSpPr>
+        <p:cNvPr id="1" name=""/>
+        <p:cNvGrpSpPr/>
+        <p:nvPr/>
+      </p:nvGrpSpPr>
+      <p:grpSpPr/>
+      <p:sp>
+        <p:nvSpPr>
+          <p:cNvPr id="2" name="Rectangle 1"/>
+          <p:cNvSpPr/>
+          <p:nvPr/>
+        </p:nvSpPr>
+        <p:spPr>
+          <a:xfrm>
+            <a:off x="0" y="0"/>
+            <a:ext cx="12191695" cy="841248"/>
+          </a:xfrm>
+          <a:prstGeom prst="rect">
+            <a:avLst/>
+          </a:prstGeom>
+          <a:solidFill>
+            <a:srgbClr val="1F3A5F"/>
+          </a:solidFill>
+          <a:ln>
+            <a:noFill/>
+          </a:ln>
+          <a:effectLst/>
+        </p:spPr>
+        <p:style>
+          <a:lnRef idx="1">
+            <a:schemeClr val="accent1"/>
+          </a:lnRef>
+          <a:fillRef idx="3">
+            <a:schemeClr val="accent1"/>
+          </a:fillRef>
+          <a:effectRef idx="2">
+            <a:schemeClr val="accent1"/>
+          </a:effectRef>
+          <a:fontRef idx="minor">
+            <a:schemeClr val="lt1"/>
+          </a:fontRef>
+        </p:style>
+        <p:txBody>
+          <a:bodyPr rtlCol="0" anchor="ctr" wrap="square" lIns="320040"/>
+          <a:lstStyle/>
+          <a:p>
+            <a:pPr algn="ctr">
+              <a:defRPr sz="2500" b="1">
+                <a:solidFill>
+                  <a:srgbClr val="FFFFFF"/>
+                </a:solidFill>
+              </a:defRPr>
+            </a:pPr>
+            <a:r>
               <a:t>Co-simulation verification flow</a:t>
             </a:r>
           </a:p>
@@ -5574,7 +7257,7 @@
 </p:sld>
 </file>
 
-<file path=ppt/slides/slide12.xml><?xml version="1.0" encoding="utf-8"?>
+<file path=ppt/slides/slide13.xml><?xml version="1.0" encoding="utf-8"?>
 <p:sld xmlns:a="http://schemas.openxmlformats.org/drawingml/2006/main" xmlns:p="http://schemas.openxmlformats.org/presentationml/2006/main" xmlns:r="http://schemas.openxmlformats.org/officeDocument/2006/relationships">
   <p:cSld>
     <p:spTree>
